--- a/final_proposal_satpam.pptx
+++ b/final_proposal_satpam.pptx
@@ -14610,7 +14610,7 @@
                 </a:solidFill>
                 <a:latin typeface="Aptos"/>
               </a:rPr>
-              <a:t>Bagaimana A* dan BFS menemukan jalur risiko?</a:t>
+              <a:t>Bagaimana BFS menampilkan evidence path?</a:t>
             </a:r>
           </a:p>
         </p:txBody>
@@ -17089,7 +17089,7 @@
                 </a:solidFill>
                 <a:latin typeface="Aptos"/>
               </a:rPr>
-              <a:t>A* search</a:t>
+              <a:t>Graph search</a:t>
             </a:r>
           </a:p>
           <a:p>
@@ -20832,7 +20832,7 @@
                 </a:solidFill>
                 <a:latin typeface="Aptos"/>
               </a:rPr>
-              <a:t>A*/BFS</a:t>
+              <a:t>BFS/Rules</a:t>
             </a:r>
           </a:p>
           <a:p>
@@ -20851,7 +20851,7 @@
                 </a:solidFill>
                 <a:latin typeface="Aptos"/>
               </a:rPr>
-              <a:t>UCS/BDS</a:t>
+              <a:t>A* optional</a:t>
             </a:r>
           </a:p>
         </p:txBody>
@@ -23447,7 +23447,7 @@
                 </a:solidFill>
                 <a:latin typeface="Aptos"/>
               </a:rPr>
-              <a:t>Input</a:t>
+              <a:t>Input +</a:t>
             </a:r>
           </a:p>
           <a:p>
@@ -23466,7 +23466,7 @@
                 </a:solidFill>
                 <a:latin typeface="Aptos"/>
               </a:rPr>
-              <a:t>Data</a:t>
+              <a:t>Validate</a:t>
             </a:r>
           </a:p>
         </p:txBody>
@@ -24607,7 +24607,7 @@
                 </a:solidFill>
                 <a:latin typeface="Aptos"/>
               </a:rPr>
-              <a:t>A*, BFS,</a:t>
+              <a:t>BFS path,</a:t>
             </a:r>
           </a:p>
           <a:p>
@@ -24626,7 +24626,7 @@
                 </a:solidFill>
                 <a:latin typeface="Aptos"/>
               </a:rPr>
-              <a:t>UCS, BDS</a:t>
+              <a:t>A* optional</a:t>
             </a:r>
           </a:p>
         </p:txBody>
@@ -28925,7 +28925,7 @@
                 </a:solidFill>
                 <a:latin typeface="Aptos"/>
               </a:rPr>
-              <a:t>A* risk path untuk prioritas</a:t>
+              <a:t>Search-based risk path</a:t>
             </a:r>
           </a:p>
         </p:txBody>
@@ -31779,7 +31779,7 @@
                 </a:solidFill>
                 <a:latin typeface="Aptos"/>
               </a:rPr>
-              <a:t>A*, BFS, rules, alert</a:t>
+              <a:t>BFS, rules, opt. A*</a:t>
             </a:r>
           </a:p>
         </p:txBody>
